--- a/companies/ashcombe-advisory/Engagements/Castaneda, Adams and Davis/2018.09.10 - Briefing Deck - Castaneda, Adams and Davis.pptx
+++ b/companies/ashcombe-advisory/Engagements/Castaneda, Adams and Davis/2018.09.10 - Briefing Deck - Castaneda, Adams and Davis.pptx
@@ -3114,7 +3114,7 @@
                   <a:srgbClr val="4A2E2A"/>
                 </a:solidFill>
               </a:rPr>
-              <a:t>Investor Relations Program</a:t>
+              <a:t>Investor Relations Program: Castaneda, Adams and Davis</a:t>
             </a:r>
           </a:p>
         </p:txBody>
@@ -3139,9 +3139,27 @@
             </a:r>
           </a:p>
           <a:p>
-            <a:pPr/>
-            <a:r>
-              <a:t>Prepared by Ashcombe Advisory Partners for the leadership of Castaneda, Adams and Davis. An early briefing on the program that commenced July 7, 2018 for Castaneda, Adams and Davis.</a:t>
+            <a:pPr lvl="1"/>
+            <a:r>
+              <a:t>Progress briefing for Lauren Heath and the leadership team</a:t>
+            </a:r>
+          </a:p>
+          <a:p>
+            <a:pPr lvl="1"/>
+            <a:r>
+              <a:t>Prepared by Michael Morris, Ashcombe Advisory Partners</a:t>
+            </a:r>
+          </a:p>
+          <a:p>
+            <a:pPr lvl="1"/>
+            <a:r>
+              <a:t>Program start: July 7, 2018</a:t>
+            </a:r>
+          </a:p>
+          <a:p>
+            <a:pPr lvl="1"/>
+            <a:r>
+              <a:t>Status: early phase, roughly one quarter of the way through</a:t>
             </a:r>
           </a:p>
         </p:txBody>
@@ -3185,7 +3203,7 @@
                   <a:srgbClr val="4A2E2A"/>
                 </a:solidFill>
               </a:rPr>
-              <a:t>Where We Stand</a:t>
+              <a:t>Where the program stands</a:t>
             </a:r>
           </a:p>
         </p:txBody>
@@ -3207,31 +3225,25 @@
           <a:p>
             <a:pPr lvl="1"/>
             <a:r>
-              <a:t>The core messaging framework is drafted and in internal review.</a:t>
+              <a:t>The foundations are in: we have heard how the company is read today and agreed how it wants to be read.</a:t>
             </a:r>
           </a:p>
           <a:p>
             <a:pPr lvl="1"/>
             <a:r>
-              <a:t>The proof points behind each message are being confirmed one by one.</a:t>
+              <a:t>Listening is done, from your leadership and from analysts who cover the sector.</a:t>
             </a:r>
           </a:p>
           <a:p>
             <a:pPr lvl="1"/>
             <a:r>
-              <a:t>The investor calendar for the quarters ahead is mapped in draft.</a:t>
+              <a:t>Drafting of the core messages is under way and on the plan we set at kickoff.</a:t>
             </a:r>
           </a:p>
           <a:p>
             <a:pPr lvl="1"/>
             <a:r>
-              <a:t>We are in the early phase: settling the story before it travels.</a:t>
-            </a:r>
-          </a:p>
-          <a:p>
-            <a:pPr lvl="1"/>
-            <a:r>
-              <a:t>The aim this quarter is a story that holds under a hard question.</a:t>
+              <a:t>Nothing on the calendar has been missed, and no message has had to be written against the clock.</a:t>
             </a:r>
           </a:p>
         </p:txBody>
@@ -3275,7 +3287,7 @@
                   <a:srgbClr val="4A2E2A"/>
                 </a:solidFill>
               </a:rPr>
-              <a:t>Your Ashcombe Team</a:t>
+              <a:t>The message architecture</a:t>
             </a:r>
           </a:p>
         </p:txBody>
@@ -3297,25 +3309,25 @@
           <a:p>
             <a:pPr lvl="1"/>
             <a:r>
-              <a:t>Michael Morris, Partner -- engagement lead and your point of contact.</a:t>
+              <a:t>One core narrative that says plainly what the company is and where it is going.</a:t>
             </a:r>
           </a:p>
           <a:p>
             <a:pPr lvl="1"/>
             <a:r>
-              <a:t>Laura Bradley, Senior Associate -- messaging and client-facing drafts.</a:t>
+              <a:t>Three supporting messages, each carried by concrete proof points rather than adjectives.</a:t>
             </a:r>
           </a:p>
           <a:p>
             <a:pPr lvl="1"/>
             <a:r>
-              <a:t>Michelle Black, Communications Analyst -- supporting material and proof points.</a:t>
+              <a:t>Written in the company's own register, so it reads as the company speaking and not as an agency writing on its behalf.</a:t>
             </a:r>
           </a:p>
           <a:p>
             <a:pPr lvl="1"/>
             <a:r>
-              <a:t>Lauren Heath, Chief Operating Officer -- program sponsor at Castaneda, Adams and Davis.</a:t>
+              <a:t>A first full draft is close and will come to your team for comment.</a:t>
             </a:r>
           </a:p>
         </p:txBody>
@@ -3359,7 +3371,7 @@
                   <a:srgbClr val="4A2E2A"/>
                 </a:solidFill>
               </a:rPr>
-              <a:t>The Messaging Framework</a:t>
+              <a:t>The team and how we work</a:t>
             </a:r>
           </a:p>
         </p:txBody>
@@ -3381,31 +3393,25 @@
           <a:p>
             <a:pPr lvl="1"/>
             <a:r>
-              <a:t>A short set of core messages that carry the company's story.</a:t>
+              <a:t>Michael Morris leads the engagement and owns the strategy and the sensitive calls.</a:t>
             </a:r>
           </a:p>
           <a:p>
             <a:pPr lvl="1"/>
             <a:r>
-              <a:t>Each claim sitting over a proof point we can stand behind.</a:t>
+              <a:t>Laura Bradley carries the drafting and keeps the schedule and the moving parts in order.</a:t>
             </a:r>
           </a:p>
           <a:p>
             <a:pPr lvl="1"/>
             <a:r>
-              <a:t>One version of the story, told the same way to every audience.</a:t>
+              <a:t>Michelle Black runs the announcement timelines and the approvals that sit behind them.</a:t>
             </a:r>
           </a:p>
           <a:p>
             <a:pPr lvl="1"/>
             <a:r>
-              <a:t>Language tuned for investors and tested against the hard question.</a:t>
-            </a:r>
-          </a:p>
-          <a:p>
-            <a:pPr lvl="1"/>
-            <a:r>
-              <a:t>What is confirmed kept cleanly apart from what is still open.</a:t>
+              <a:t>The work moves mostly by email and short calls, with a working session when a decision needs the room.</a:t>
             </a:r>
           </a:p>
         </p:txBody>
@@ -3449,7 +3455,7 @@
                   <a:srgbClr val="4A2E2A"/>
                 </a:solidFill>
               </a:rPr>
-              <a:t>Investor Calendar</a:t>
+              <a:t>What we are watching</a:t>
             </a:r>
           </a:p>
         </p:txBody>
@@ -3471,25 +3477,19 @@
           <a:p>
             <a:pPr lvl="1"/>
             <a:r>
-              <a:t>Earnings and announcement moments sequenced across the term.</a:t>
+              <a:t>Timely sign-off: the later materials all build on the core narrative, so its review sets the pace.</a:t>
             </a:r>
           </a:p>
           <a:p>
             <a:pPr lvl="1"/>
             <a:r>
-              <a:t>Timing aligned to the company's schedule, never to ours.</a:t>
+              <a:t>One voice to the market: several people speak for the company, and the messaging holds only if they use the same language.</a:t>
             </a:r>
           </a:p>
           <a:p>
             <a:pPr lvl="1"/>
             <a:r>
-              <a:t>A single working calendar kept current so no one is guessing.</a:t>
-            </a:r>
-          </a:p>
-          <a:p>
-            <a:pPr lvl="1"/>
-            <a:r>
-              <a:t>Decisions on order made together, and made early rather than late.</a:t>
+              <a:t>A live announcement in the window: if a result or a deal lands mid-program, we will want to test the messaging against it first.</a:t>
             </a:r>
           </a:p>
         </p:txBody>
@@ -3533,7 +3533,7 @@
                   <a:srgbClr val="4A2E2A"/>
                 </a:solidFill>
               </a:rPr>
-              <a:t>Next Steps</a:t>
+              <a:t>Next steps</a:t>
             </a:r>
           </a:p>
         </p:txBody>
@@ -3555,19 +3555,19 @@
           <a:p>
             <a:pPr lvl="1"/>
             <a:r>
-              <a:t>Finalize the messaging framework and circulate the clean version.</a:t>
+              <a:t>Send the core-narrative draft to your team for comment as soon as it is ready.</a:t>
             </a:r>
           </a:p>
           <a:p>
             <a:pPr lvl="1"/>
             <a:r>
-              <a:t>Walk the framework with the Castaneda, Adams and Davis leadership for sign-off.</a:t>
+              <a:t>Book the review so the second half of the program can start on time.</a:t>
             </a:r>
           </a:p>
           <a:p>
             <a:pPr lvl="1"/>
             <a:r>
-              <a:t>Prepare the material for the first investor cycle under the new frame.</a:t>
+              <a:t>Line up a short session with your spokespeople once the supporting messages are drafted.</a:t>
             </a:r>
           </a:p>
         </p:txBody>
